--- a/documentation/ibm-hr.pptx
+++ b/documentation/ibm-hr.pptx
@@ -9,6 +9,9 @@
     <p:sldId id="257" r:id="RelId0"/>
     <p:sldId id="258" r:id="RelId1"/>
     <p:sldId id="259" r:id="RelId2"/>
+    <p:sldId id="260" r:id="RelId3"/>
+    <p:sldId id="261" r:id="RelId4"/>
+    <p:sldId id="262" r:id="RelId5"/>
   </p:sldIdLst>
   <p:sldSz cx="12192000" cy="6858000"/>
   <p:notesSz cx="6858000" cy="9144000"/>
@@ -247,7 +250,7 @@
           <a:p xmlns:a="http://schemas.openxmlformats.org/drawingml/2006/main">
             <a:r>
               <a:rPr b="1" dirty="0"/>
-              <a:t>Índice Equilíbrio Trabalho/Vida Atual</a:t>
+              <a:t>% Equilíbrio Vida/Trabalho Atual</a:t>
             </a:r>
             <a:endParaRPr dirty="0"/>
           </a:p>
@@ -289,7 +292,7 @@
           <a:p xmlns:a="http://schemas.openxmlformats.org/drawingml/2006/main">
             <a:r>
               <a:rPr b="1" dirty="0"/>
-              <a:t>Índice Felicidade Atual</a:t>
+              <a:t>% Felicidade Atual</a:t>
             </a:r>
             <a:endParaRPr dirty="0"/>
           </a:p>
@@ -541,7 +544,7 @@
           <a:p xmlns:a="http://schemas.openxmlformats.org/drawingml/2006/main">
             <a:r>
               <a:rPr b="1" dirty="0"/>
-              <a:t>Inicial vs. atual por departamento</a:t>
+              <a:t>% Felicidade inicial vs. atual por departamento</a:t>
             </a:r>
             <a:endParaRPr dirty="0"/>
           </a:p>
@@ -1870,6 +1873,1914 @@
             <a:r>
               <a:rPr b="1" dirty="0"/>
               <a:t>% Reforma em 5 anos</a:t>
+            </a:r>
+            <a:endParaRPr dirty="0"/>
+          </a:p>
+          <a:p xmlns:a="http://schemas.openxmlformats.org/drawingml/2006/main">
+            <a:r>
+              <a:rPr b="0" dirty="0"/>
+              <a:t>No alt text provided</a:t>
+            </a:r>
+            <a:endParaRPr dirty="0"/>
+          </a:p>
+          <a:p xmlns:a="http://schemas.openxmlformats.org/drawingml/2006/main">
+            <a:r>
+              <a:rPr b="0" dirty="0"/>
+              <a:t/>
+            </a:r>
+            <a:endParaRPr dirty="0"/>
+          </a:p>
+        </p:txBody>
+      </p:sp>
+    </p:spTree>
+    <p:clrMapOvr>
+      <a:masterClrMapping xmlns:a="http://schemas.openxmlformats.org/drawingml/2006/main"/>
+    </p:clrMapOvr>
+  </p:cSld>
+</p:notes>
+</file>
+
+<file path=ppt/notesSlides/notesSlide4.xml><?xml version="1.0" encoding="utf-8"?>
+<p:notes xmlns:p="http://schemas.openxmlformats.org/presentationml/2006/main">
+  <p:cSld>
+    <p:spTree>
+      <p:nvGrpSpPr>
+        <p:cNvPr id="1" name=""/>
+        <p:cNvGrpSpPr/>
+        <p:nvPr/>
+      </p:nvGrpSpPr>
+      <p:grpSpPr/>
+      <p:sp>
+        <p:nvSpPr>
+          <p:cNvPr id="2" name="Slide Text"/>
+          <p:cNvSpPr>
+            <a:spLocks xmlns:a="http://schemas.openxmlformats.org/drawingml/2006/main" noGrp="1"/>
+          </p:cNvSpPr>
+          <p:nvPr>
+            <p:ph type="body" idx="1"/>
+          </p:nvPr>
+        </p:nvSpPr>
+        <p:spPr/>
+        <p:txBody>
+          <a:bodyPr xmlns:a="http://schemas.openxmlformats.org/drawingml/2006/main"/>
+          <a:lstStyle xmlns:a="http://schemas.openxmlformats.org/drawingml/2006/main"/>
+          <a:p xmlns:a="http://schemas.openxmlformats.org/drawingml/2006/main">
+            <a:r>
+              <a:rPr b="1" dirty="0"/>
+              <a:t>% Envolvimento Inicial</a:t>
+            </a:r>
+            <a:endParaRPr dirty="0"/>
+          </a:p>
+          <a:p xmlns:a="http://schemas.openxmlformats.org/drawingml/2006/main">
+            <a:r>
+              <a:rPr b="0" dirty="0"/>
+              <a:t>No alt text provided</a:t>
+            </a:r>
+            <a:endParaRPr dirty="0"/>
+          </a:p>
+          <a:p xmlns:a="http://schemas.openxmlformats.org/drawingml/2006/main">
+            <a:r>
+              <a:rPr b="0" dirty="0"/>
+              <a:t/>
+            </a:r>
+            <a:endParaRPr dirty="0"/>
+          </a:p>
+          <a:p xmlns:a="http://schemas.openxmlformats.org/drawingml/2006/main">
+            <a:r>
+              <a:rPr b="1" dirty="0"/>
+              <a:t>N.º Felicidade boa ou +</a:t>
+            </a:r>
+            <a:endParaRPr dirty="0"/>
+          </a:p>
+          <a:p xmlns:a="http://schemas.openxmlformats.org/drawingml/2006/main">
+            <a:r>
+              <a:rPr b="0" dirty="0"/>
+              <a:t>No alt text provided</a:t>
+            </a:r>
+            <a:endParaRPr dirty="0"/>
+          </a:p>
+          <a:p xmlns:a="http://schemas.openxmlformats.org/drawingml/2006/main">
+            <a:r>
+              <a:rPr b="0" dirty="0"/>
+              <a:t/>
+            </a:r>
+            <a:endParaRPr dirty="0"/>
+          </a:p>
+          <a:p xmlns:a="http://schemas.openxmlformats.org/drawingml/2006/main">
+            <a:r>
+              <a:rPr b="1" dirty="0"/>
+              <a:t>Distribuição Equilíbrio Vida/Trabalho - Survey Inicial</a:t>
+            </a:r>
+            <a:endParaRPr dirty="0"/>
+          </a:p>
+          <a:p xmlns:a="http://schemas.openxmlformats.org/drawingml/2006/main">
+            <a:r>
+              <a:rPr b="0" dirty="0"/>
+              <a:t>No alt text provided</a:t>
+            </a:r>
+            <a:endParaRPr dirty="0"/>
+          </a:p>
+          <a:p xmlns:a="http://schemas.openxmlformats.org/drawingml/2006/main">
+            <a:r>
+              <a:rPr b="0" dirty="0"/>
+              <a:t/>
+            </a:r>
+            <a:endParaRPr dirty="0"/>
+          </a:p>
+          <a:p xmlns:a="http://schemas.openxmlformats.org/drawingml/2006/main">
+            <a:r>
+              <a:rPr b="1" dirty="0"/>
+              <a:t>actionButton</a:t>
+            </a:r>
+            <a:endParaRPr dirty="0"/>
+          </a:p>
+          <a:p xmlns:a="http://schemas.openxmlformats.org/drawingml/2006/main">
+            <a:r>
+              <a:rPr b="0" dirty="0"/>
+              <a:t>No alt text provided</a:t>
+            </a:r>
+            <a:endParaRPr dirty="0"/>
+          </a:p>
+          <a:p xmlns:a="http://schemas.openxmlformats.org/drawingml/2006/main">
+            <a:r>
+              <a:rPr b="0" dirty="0"/>
+              <a:t/>
+            </a:r>
+            <a:endParaRPr dirty="0"/>
+          </a:p>
+          <a:p xmlns:a="http://schemas.openxmlformats.org/drawingml/2006/main">
+            <a:r>
+              <a:rPr b="1" dirty="0"/>
+              <a:t>textbox</a:t>
+            </a:r>
+            <a:endParaRPr dirty="0"/>
+          </a:p>
+          <a:p xmlns:a="http://schemas.openxmlformats.org/drawingml/2006/main">
+            <a:r>
+              <a:rPr b="0" dirty="0"/>
+              <a:t>No alt text provided</a:t>
+            </a:r>
+            <a:endParaRPr dirty="0"/>
+          </a:p>
+          <a:p xmlns:a="http://schemas.openxmlformats.org/drawingml/2006/main">
+            <a:r>
+              <a:rPr b="0" dirty="0"/>
+              <a:t/>
+            </a:r>
+            <a:endParaRPr dirty="0"/>
+          </a:p>
+          <a:p xmlns:a="http://schemas.openxmlformats.org/drawingml/2006/main">
+            <a:r>
+              <a:rPr b="1" dirty="0"/>
+              <a:t>slicer</a:t>
+            </a:r>
+            <a:endParaRPr dirty="0"/>
+          </a:p>
+          <a:p xmlns:a="http://schemas.openxmlformats.org/drawingml/2006/main">
+            <a:r>
+              <a:rPr b="0" dirty="0"/>
+              <a:t>No alt text provided</a:t>
+            </a:r>
+            <a:endParaRPr dirty="0"/>
+          </a:p>
+          <a:p xmlns:a="http://schemas.openxmlformats.org/drawingml/2006/main">
+            <a:r>
+              <a:rPr b="0" dirty="0"/>
+              <a:t/>
+            </a:r>
+            <a:endParaRPr dirty="0"/>
+          </a:p>
+          <a:p xmlns:a="http://schemas.openxmlformats.org/drawingml/2006/main">
+            <a:r>
+              <a:rPr b="1" dirty="0"/>
+              <a:t>shape</a:t>
+            </a:r>
+            <a:endParaRPr dirty="0"/>
+          </a:p>
+          <a:p xmlns:a="http://schemas.openxmlformats.org/drawingml/2006/main">
+            <a:r>
+              <a:rPr b="0" dirty="0"/>
+              <a:t>No alt text provided</a:t>
+            </a:r>
+            <a:endParaRPr dirty="0"/>
+          </a:p>
+          <a:p xmlns:a="http://schemas.openxmlformats.org/drawingml/2006/main">
+            <a:r>
+              <a:rPr b="0" dirty="0"/>
+              <a:t/>
+            </a:r>
+            <a:endParaRPr dirty="0"/>
+          </a:p>
+          <a:p xmlns:a="http://schemas.openxmlformats.org/drawingml/2006/main">
+            <a:r>
+              <a:rPr b="1" dirty="0"/>
+              <a:t>slicer</a:t>
+            </a:r>
+            <a:endParaRPr dirty="0"/>
+          </a:p>
+          <a:p xmlns:a="http://schemas.openxmlformats.org/drawingml/2006/main">
+            <a:r>
+              <a:rPr b="0" dirty="0"/>
+              <a:t>No alt text provided</a:t>
+            </a:r>
+            <a:endParaRPr dirty="0"/>
+          </a:p>
+          <a:p xmlns:a="http://schemas.openxmlformats.org/drawingml/2006/main">
+            <a:r>
+              <a:rPr b="0" dirty="0"/>
+              <a:t/>
+            </a:r>
+            <a:endParaRPr dirty="0"/>
+          </a:p>
+          <a:p xmlns:a="http://schemas.openxmlformats.org/drawingml/2006/main">
+            <a:r>
+              <a:rPr b="1" dirty="0"/>
+              <a:t>Dimensões de Satisfação - Survey Inicial</a:t>
+            </a:r>
+            <a:endParaRPr dirty="0"/>
+          </a:p>
+          <a:p xmlns:a="http://schemas.openxmlformats.org/drawingml/2006/main">
+            <a:r>
+              <a:rPr b="0" dirty="0"/>
+              <a:t>No alt text provided</a:t>
+            </a:r>
+            <a:endParaRPr dirty="0"/>
+          </a:p>
+          <a:p xmlns:a="http://schemas.openxmlformats.org/drawingml/2006/main">
+            <a:r>
+              <a:rPr b="0" dirty="0"/>
+              <a:t/>
+            </a:r>
+            <a:endParaRPr dirty="0"/>
+          </a:p>
+          <a:p xmlns:a="http://schemas.openxmlformats.org/drawingml/2006/main">
+            <a:r>
+              <a:rPr b="1" dirty="0"/>
+              <a:t>Colaboradores Iniciais</a:t>
+            </a:r>
+            <a:endParaRPr dirty="0"/>
+          </a:p>
+          <a:p xmlns:a="http://schemas.openxmlformats.org/drawingml/2006/main">
+            <a:r>
+              <a:rPr b="0" dirty="0"/>
+              <a:t>No alt text provided</a:t>
+            </a:r>
+            <a:endParaRPr dirty="0"/>
+          </a:p>
+          <a:p xmlns:a="http://schemas.openxmlformats.org/drawingml/2006/main">
+            <a:r>
+              <a:rPr b="0" dirty="0"/>
+              <a:t/>
+            </a:r>
+            <a:endParaRPr dirty="0"/>
+          </a:p>
+          <a:p xmlns:a="http://schemas.openxmlformats.org/drawingml/2006/main">
+            <a:r>
+              <a:rPr b="1" dirty="0"/>
+              <a:t>% Felicidade Inicial</a:t>
+            </a:r>
+            <a:endParaRPr dirty="0"/>
+          </a:p>
+          <a:p xmlns:a="http://schemas.openxmlformats.org/drawingml/2006/main">
+            <a:r>
+              <a:rPr b="0" dirty="0"/>
+              <a:t>No alt text provided</a:t>
+            </a:r>
+            <a:endParaRPr dirty="0"/>
+          </a:p>
+          <a:p xmlns:a="http://schemas.openxmlformats.org/drawingml/2006/main">
+            <a:r>
+              <a:rPr b="0" dirty="0"/>
+              <a:t/>
+            </a:r>
+            <a:endParaRPr dirty="0"/>
+          </a:p>
+          <a:p xmlns:a="http://schemas.openxmlformats.org/drawingml/2006/main">
+            <a:r>
+              <a:rPr b="1" dirty="0"/>
+              <a:t>actionButton</a:t>
+            </a:r>
+            <a:endParaRPr dirty="0"/>
+          </a:p>
+          <a:p xmlns:a="http://schemas.openxmlformats.org/drawingml/2006/main">
+            <a:r>
+              <a:rPr b="0" dirty="0"/>
+              <a:t>No alt text provided</a:t>
+            </a:r>
+            <a:endParaRPr dirty="0"/>
+          </a:p>
+          <a:p xmlns:a="http://schemas.openxmlformats.org/drawingml/2006/main">
+            <a:r>
+              <a:rPr b="0" dirty="0"/>
+              <a:t/>
+            </a:r>
+            <a:endParaRPr dirty="0"/>
+          </a:p>
+          <a:p xmlns:a="http://schemas.openxmlformats.org/drawingml/2006/main">
+            <a:r>
+              <a:rPr b="1" dirty="0"/>
+              <a:t>% Equil. V/T Crítico Inicial</a:t>
+            </a:r>
+            <a:endParaRPr dirty="0"/>
+          </a:p>
+          <a:p xmlns:a="http://schemas.openxmlformats.org/drawingml/2006/main">
+            <a:r>
+              <a:rPr b="0" dirty="0"/>
+              <a:t>No alt text provided</a:t>
+            </a:r>
+            <a:endParaRPr dirty="0"/>
+          </a:p>
+          <a:p xmlns:a="http://schemas.openxmlformats.org/drawingml/2006/main">
+            <a:r>
+              <a:rPr b="0" dirty="0"/>
+              <a:t/>
+            </a:r>
+            <a:endParaRPr dirty="0"/>
+          </a:p>
+          <a:p xmlns:a="http://schemas.openxmlformats.org/drawingml/2006/main">
+            <a:r>
+              <a:rPr b="1" dirty="0"/>
+              <a:t>textbox</a:t>
+            </a:r>
+            <a:endParaRPr dirty="0"/>
+          </a:p>
+          <a:p xmlns:a="http://schemas.openxmlformats.org/drawingml/2006/main">
+            <a:r>
+              <a:rPr b="0" dirty="0"/>
+              <a:t>No alt text provided</a:t>
+            </a:r>
+            <a:endParaRPr dirty="0"/>
+          </a:p>
+          <a:p xmlns:a="http://schemas.openxmlformats.org/drawingml/2006/main">
+            <a:r>
+              <a:rPr b="0" dirty="0"/>
+              <a:t/>
+            </a:r>
+            <a:endParaRPr dirty="0"/>
+          </a:p>
+          <a:p xmlns:a="http://schemas.openxmlformats.org/drawingml/2006/main">
+            <a:r>
+              <a:rPr b="1" dirty="0"/>
+              <a:t>slicer</a:t>
+            </a:r>
+            <a:endParaRPr dirty="0"/>
+          </a:p>
+          <a:p xmlns:a="http://schemas.openxmlformats.org/drawingml/2006/main">
+            <a:r>
+              <a:rPr b="0" dirty="0"/>
+              <a:t>No alt text provided</a:t>
+            </a:r>
+            <a:endParaRPr dirty="0"/>
+          </a:p>
+          <a:p xmlns:a="http://schemas.openxmlformats.org/drawingml/2006/main">
+            <a:r>
+              <a:rPr b="0" dirty="0"/>
+              <a:t/>
+            </a:r>
+            <a:endParaRPr dirty="0"/>
+          </a:p>
+          <a:p xmlns:a="http://schemas.openxmlformats.org/drawingml/2006/main">
+            <a:r>
+              <a:rPr b="1" dirty="0"/>
+              <a:t>Felicidade Inicial por Departamento</a:t>
+            </a:r>
+            <a:endParaRPr dirty="0"/>
+          </a:p>
+          <a:p xmlns:a="http://schemas.openxmlformats.org/drawingml/2006/main">
+            <a:r>
+              <a:rPr b="0" dirty="0"/>
+              <a:t>No alt text provided</a:t>
+            </a:r>
+            <a:endParaRPr dirty="0"/>
+          </a:p>
+          <a:p xmlns:a="http://schemas.openxmlformats.org/drawingml/2006/main">
+            <a:r>
+              <a:rPr b="0" dirty="0"/>
+              <a:t/>
+            </a:r>
+            <a:endParaRPr dirty="0"/>
+          </a:p>
+          <a:p xmlns:a="http://schemas.openxmlformats.org/drawingml/2006/main">
+            <a:r>
+              <a:rPr b="1" dirty="0"/>
+              <a:t>actionButton</a:t>
+            </a:r>
+            <a:endParaRPr dirty="0"/>
+          </a:p>
+          <a:p xmlns:a="http://schemas.openxmlformats.org/drawingml/2006/main">
+            <a:r>
+              <a:rPr b="0" dirty="0"/>
+              <a:t>No alt text provided</a:t>
+            </a:r>
+            <a:endParaRPr dirty="0"/>
+          </a:p>
+          <a:p xmlns:a="http://schemas.openxmlformats.org/drawingml/2006/main">
+            <a:r>
+              <a:rPr b="0" dirty="0"/>
+              <a:t/>
+            </a:r>
+            <a:endParaRPr dirty="0"/>
+          </a:p>
+          <a:p xmlns:a="http://schemas.openxmlformats.org/drawingml/2006/main">
+            <a:r>
+              <a:rPr b="1" dirty="0"/>
+              <a:t>actionButton</a:t>
+            </a:r>
+            <a:endParaRPr dirty="0"/>
+          </a:p>
+          <a:p xmlns:a="http://schemas.openxmlformats.org/drawingml/2006/main">
+            <a:r>
+              <a:rPr b="0" dirty="0"/>
+              <a:t>No alt text provided</a:t>
+            </a:r>
+            <a:endParaRPr dirty="0"/>
+          </a:p>
+          <a:p xmlns:a="http://schemas.openxmlformats.org/drawingml/2006/main">
+            <a:r>
+              <a:rPr b="0" dirty="0"/>
+              <a:t/>
+            </a:r>
+            <a:endParaRPr dirty="0"/>
+          </a:p>
+          <a:p xmlns:a="http://schemas.openxmlformats.org/drawingml/2006/main">
+            <a:r>
+              <a:rPr b="1" dirty="0"/>
+              <a:t>image</a:t>
+            </a:r>
+            <a:endParaRPr dirty="0"/>
+          </a:p>
+          <a:p xmlns:a="http://schemas.openxmlformats.org/drawingml/2006/main">
+            <a:r>
+              <a:rPr b="0" dirty="0"/>
+              <a:t>No alt text provided</a:t>
+            </a:r>
+            <a:endParaRPr dirty="0"/>
+          </a:p>
+          <a:p xmlns:a="http://schemas.openxmlformats.org/drawingml/2006/main">
+            <a:r>
+              <a:rPr b="0" dirty="0"/>
+              <a:t/>
+            </a:r>
+            <a:endParaRPr dirty="0"/>
+          </a:p>
+          <a:p xmlns:a="http://schemas.openxmlformats.org/drawingml/2006/main">
+            <a:r>
+              <a:rPr b="1" dirty="0"/>
+              <a:t>actionButton</a:t>
+            </a:r>
+            <a:endParaRPr dirty="0"/>
+          </a:p>
+          <a:p xmlns:a="http://schemas.openxmlformats.org/drawingml/2006/main">
+            <a:r>
+              <a:rPr b="0" dirty="0"/>
+              <a:t>No alt text provided</a:t>
+            </a:r>
+            <a:endParaRPr dirty="0"/>
+          </a:p>
+          <a:p xmlns:a="http://schemas.openxmlformats.org/drawingml/2006/main">
+            <a:r>
+              <a:rPr b="0" dirty="0"/>
+              <a:t/>
+            </a:r>
+            <a:endParaRPr dirty="0"/>
+          </a:p>
+          <a:p xmlns:a="http://schemas.openxmlformats.org/drawingml/2006/main">
+            <a:r>
+              <a:rPr b="1" dirty="0"/>
+              <a:t>actionButton</a:t>
+            </a:r>
+            <a:endParaRPr dirty="0"/>
+          </a:p>
+          <a:p xmlns:a="http://schemas.openxmlformats.org/drawingml/2006/main">
+            <a:r>
+              <a:rPr b="0" dirty="0"/>
+              <a:t>No alt text provided</a:t>
+            </a:r>
+            <a:endParaRPr dirty="0"/>
+          </a:p>
+          <a:p xmlns:a="http://schemas.openxmlformats.org/drawingml/2006/main">
+            <a:r>
+              <a:rPr b="0" dirty="0"/>
+              <a:t/>
+            </a:r>
+            <a:endParaRPr dirty="0"/>
+          </a:p>
+          <a:p xmlns:a="http://schemas.openxmlformats.org/drawingml/2006/main">
+            <a:r>
+              <a:rPr b="1" dirty="0"/>
+              <a:t>actionButton</a:t>
+            </a:r>
+            <a:endParaRPr dirty="0"/>
+          </a:p>
+          <a:p xmlns:a="http://schemas.openxmlformats.org/drawingml/2006/main">
+            <a:r>
+              <a:rPr b="0" dirty="0"/>
+              <a:t>No alt text provided</a:t>
+            </a:r>
+            <a:endParaRPr dirty="0"/>
+          </a:p>
+          <a:p xmlns:a="http://schemas.openxmlformats.org/drawingml/2006/main">
+            <a:r>
+              <a:rPr b="0" dirty="0"/>
+              <a:t/>
+            </a:r>
+            <a:endParaRPr dirty="0"/>
+          </a:p>
+          <a:p xmlns:a="http://schemas.openxmlformats.org/drawingml/2006/main">
+            <a:r>
+              <a:rPr b="1" dirty="0"/>
+              <a:t>actionButton</a:t>
+            </a:r>
+            <a:endParaRPr dirty="0"/>
+          </a:p>
+          <a:p xmlns:a="http://schemas.openxmlformats.org/drawingml/2006/main">
+            <a:r>
+              <a:rPr b="0" dirty="0"/>
+              <a:t>No alt text provided</a:t>
+            </a:r>
+            <a:endParaRPr dirty="0"/>
+          </a:p>
+          <a:p xmlns:a="http://schemas.openxmlformats.org/drawingml/2006/main">
+            <a:r>
+              <a:rPr b="0" dirty="0"/>
+              <a:t/>
+            </a:r>
+            <a:endParaRPr dirty="0"/>
+          </a:p>
+          <a:p xmlns:a="http://schemas.openxmlformats.org/drawingml/2006/main">
+            <a:r>
+              <a:rPr b="1" dirty="0"/>
+              <a:t>shape</a:t>
+            </a:r>
+            <a:endParaRPr dirty="0"/>
+          </a:p>
+          <a:p xmlns:a="http://schemas.openxmlformats.org/drawingml/2006/main">
+            <a:r>
+              <a:rPr b="0" dirty="0"/>
+              <a:t>No alt text provided</a:t>
+            </a:r>
+            <a:endParaRPr dirty="0"/>
+          </a:p>
+          <a:p xmlns:a="http://schemas.openxmlformats.org/drawingml/2006/main">
+            <a:r>
+              <a:rPr b="0" dirty="0"/>
+              <a:t/>
+            </a:r>
+            <a:endParaRPr dirty="0"/>
+          </a:p>
+          <a:p xmlns:a="http://schemas.openxmlformats.org/drawingml/2006/main">
+            <a:r>
+              <a:rPr b="1" dirty="0"/>
+              <a:t>shape</a:t>
+            </a:r>
+            <a:endParaRPr dirty="0"/>
+          </a:p>
+          <a:p xmlns:a="http://schemas.openxmlformats.org/drawingml/2006/main">
+            <a:r>
+              <a:rPr b="0" dirty="0"/>
+              <a:t>No alt text provided</a:t>
+            </a:r>
+            <a:endParaRPr dirty="0"/>
+          </a:p>
+          <a:p xmlns:a="http://schemas.openxmlformats.org/drawingml/2006/main">
+            <a:r>
+              <a:rPr b="0" dirty="0"/>
+              <a:t/>
+            </a:r>
+            <a:endParaRPr dirty="0"/>
+          </a:p>
+          <a:p xmlns:a="http://schemas.openxmlformats.org/drawingml/2006/main">
+            <a:r>
+              <a:rPr b="1" dirty="0"/>
+              <a:t>actionButton</a:t>
+            </a:r>
+            <a:endParaRPr dirty="0"/>
+          </a:p>
+          <a:p xmlns:a="http://schemas.openxmlformats.org/drawingml/2006/main">
+            <a:r>
+              <a:rPr b="0" dirty="0"/>
+              <a:t>No alt text provided</a:t>
+            </a:r>
+            <a:endParaRPr dirty="0"/>
+          </a:p>
+          <a:p xmlns:a="http://schemas.openxmlformats.org/drawingml/2006/main">
+            <a:r>
+              <a:rPr b="0" dirty="0"/>
+              <a:t/>
+            </a:r>
+            <a:endParaRPr dirty="0"/>
+          </a:p>
+          <a:p xmlns:a="http://schemas.openxmlformats.org/drawingml/2006/main">
+            <a:r>
+              <a:rPr b="1" dirty="0"/>
+              <a:t>% Equilíbrio V/T Inicial</a:t>
+            </a:r>
+            <a:endParaRPr dirty="0"/>
+          </a:p>
+          <a:p xmlns:a="http://schemas.openxmlformats.org/drawingml/2006/main">
+            <a:r>
+              <a:rPr b="0" dirty="0"/>
+              <a:t>No alt text provided</a:t>
+            </a:r>
+            <a:endParaRPr dirty="0"/>
+          </a:p>
+          <a:p xmlns:a="http://schemas.openxmlformats.org/drawingml/2006/main">
+            <a:r>
+              <a:rPr b="0" dirty="0"/>
+              <a:t/>
+            </a:r>
+            <a:endParaRPr dirty="0"/>
+          </a:p>
+          <a:p xmlns:a="http://schemas.openxmlformats.org/drawingml/2006/main">
+            <a:r>
+              <a:rPr b="1" dirty="0"/>
+              <a:t>Matriz Inicial de Satisfação</a:t>
+            </a:r>
+            <a:endParaRPr dirty="0"/>
+          </a:p>
+          <a:p xmlns:a="http://schemas.openxmlformats.org/drawingml/2006/main">
+            <a:r>
+              <a:rPr b="0" dirty="0"/>
+              <a:t>No alt text provided</a:t>
+            </a:r>
+            <a:endParaRPr dirty="0"/>
+          </a:p>
+          <a:p xmlns:a="http://schemas.openxmlformats.org/drawingml/2006/main">
+            <a:r>
+              <a:rPr b="0" dirty="0"/>
+              <a:t/>
+            </a:r>
+            <a:endParaRPr dirty="0"/>
+          </a:p>
+          <a:p xmlns:a="http://schemas.openxmlformats.org/drawingml/2006/main">
+            <a:r>
+              <a:rPr b="1" dirty="0"/>
+              <a:t>Equilíbrio V/T Inicial por Departamento</a:t>
+            </a:r>
+            <a:endParaRPr dirty="0"/>
+          </a:p>
+          <a:p xmlns:a="http://schemas.openxmlformats.org/drawingml/2006/main">
+            <a:r>
+              <a:rPr b="0" dirty="0"/>
+              <a:t>No alt text provided</a:t>
+            </a:r>
+            <a:endParaRPr dirty="0"/>
+          </a:p>
+          <a:p xmlns:a="http://schemas.openxmlformats.org/drawingml/2006/main">
+            <a:r>
+              <a:rPr b="0" dirty="0"/>
+              <a:t/>
+            </a:r>
+            <a:endParaRPr dirty="0"/>
+          </a:p>
+        </p:txBody>
+      </p:sp>
+    </p:spTree>
+    <p:clrMapOvr>
+      <a:masterClrMapping xmlns:a="http://schemas.openxmlformats.org/drawingml/2006/main"/>
+    </p:clrMapOvr>
+  </p:cSld>
+</p:notes>
+</file>
+
+<file path=ppt/notesSlides/notesSlide5.xml><?xml version="1.0" encoding="utf-8"?>
+<p:notes xmlns:p="http://schemas.openxmlformats.org/presentationml/2006/main">
+  <p:cSld>
+    <p:spTree>
+      <p:nvGrpSpPr>
+        <p:cNvPr id="1" name=""/>
+        <p:cNvGrpSpPr/>
+        <p:nvPr/>
+      </p:nvGrpSpPr>
+      <p:grpSpPr/>
+      <p:sp>
+        <p:nvSpPr>
+          <p:cNvPr id="2" name="Slide Text"/>
+          <p:cNvSpPr>
+            <a:spLocks xmlns:a="http://schemas.openxmlformats.org/drawingml/2006/main" noGrp="1"/>
+          </p:cNvSpPr>
+          <p:nvPr>
+            <p:ph type="body" idx="1"/>
+          </p:nvPr>
+        </p:nvSpPr>
+        <p:spPr/>
+        <p:txBody>
+          <a:bodyPr xmlns:a="http://schemas.openxmlformats.org/drawingml/2006/main"/>
+          <a:lstStyle xmlns:a="http://schemas.openxmlformats.org/drawingml/2006/main"/>
+          <a:p xmlns:a="http://schemas.openxmlformats.org/drawingml/2006/main">
+            <a:r>
+              <a:rPr b="1" dirty="0"/>
+              <a:t>actionButton</a:t>
+            </a:r>
+            <a:endParaRPr dirty="0"/>
+          </a:p>
+          <a:p xmlns:a="http://schemas.openxmlformats.org/drawingml/2006/main">
+            <a:r>
+              <a:rPr b="0" dirty="0"/>
+              <a:t>No alt text provided</a:t>
+            </a:r>
+            <a:endParaRPr dirty="0"/>
+          </a:p>
+          <a:p xmlns:a="http://schemas.openxmlformats.org/drawingml/2006/main">
+            <a:r>
+              <a:rPr b="0" dirty="0"/>
+              <a:t/>
+            </a:r>
+            <a:endParaRPr dirty="0"/>
+          </a:p>
+          <a:p xmlns:a="http://schemas.openxmlformats.org/drawingml/2006/main">
+            <a:r>
+              <a:rPr b="1" dirty="0"/>
+              <a:t>N.º Felicidade boa ou +</a:t>
+            </a:r>
+            <a:endParaRPr dirty="0"/>
+          </a:p>
+          <a:p xmlns:a="http://schemas.openxmlformats.org/drawingml/2006/main">
+            <a:r>
+              <a:rPr b="0" dirty="0"/>
+              <a:t>No alt text provided</a:t>
+            </a:r>
+            <a:endParaRPr dirty="0"/>
+          </a:p>
+          <a:p xmlns:a="http://schemas.openxmlformats.org/drawingml/2006/main">
+            <a:r>
+              <a:rPr b="0" dirty="0"/>
+              <a:t/>
+            </a:r>
+            <a:endParaRPr dirty="0"/>
+          </a:p>
+          <a:p xmlns:a="http://schemas.openxmlformats.org/drawingml/2006/main">
+            <a:r>
+              <a:rPr b="1" dirty="0"/>
+              <a:t>actionButton</a:t>
+            </a:r>
+            <a:endParaRPr dirty="0"/>
+          </a:p>
+          <a:p xmlns:a="http://schemas.openxmlformats.org/drawingml/2006/main">
+            <a:r>
+              <a:rPr b="0" dirty="0"/>
+              <a:t>No alt text provided</a:t>
+            </a:r>
+            <a:endParaRPr dirty="0"/>
+          </a:p>
+          <a:p xmlns:a="http://schemas.openxmlformats.org/drawingml/2006/main">
+            <a:r>
+              <a:rPr b="0" dirty="0"/>
+              <a:t/>
+            </a:r>
+            <a:endParaRPr dirty="0"/>
+          </a:p>
+          <a:p xmlns:a="http://schemas.openxmlformats.org/drawingml/2006/main">
+            <a:r>
+              <a:rPr b="1" dirty="0"/>
+              <a:t>textbox</a:t>
+            </a:r>
+            <a:endParaRPr dirty="0"/>
+          </a:p>
+          <a:p xmlns:a="http://schemas.openxmlformats.org/drawingml/2006/main">
+            <a:r>
+              <a:rPr b="0" dirty="0"/>
+              <a:t>No alt text provided</a:t>
+            </a:r>
+            <a:endParaRPr dirty="0"/>
+          </a:p>
+          <a:p xmlns:a="http://schemas.openxmlformats.org/drawingml/2006/main">
+            <a:r>
+              <a:rPr b="0" dirty="0"/>
+              <a:t/>
+            </a:r>
+            <a:endParaRPr dirty="0"/>
+          </a:p>
+          <a:p xmlns:a="http://schemas.openxmlformats.org/drawingml/2006/main">
+            <a:r>
+              <a:rPr b="1" dirty="0"/>
+              <a:t>actionButton</a:t>
+            </a:r>
+            <a:endParaRPr dirty="0"/>
+          </a:p>
+          <a:p xmlns:a="http://schemas.openxmlformats.org/drawingml/2006/main">
+            <a:r>
+              <a:rPr b="0" dirty="0"/>
+              <a:t>No alt text provided</a:t>
+            </a:r>
+            <a:endParaRPr dirty="0"/>
+          </a:p>
+          <a:p xmlns:a="http://schemas.openxmlformats.org/drawingml/2006/main">
+            <a:r>
+              <a:rPr b="0" dirty="0"/>
+              <a:t/>
+            </a:r>
+            <a:endParaRPr dirty="0"/>
+          </a:p>
+          <a:p xmlns:a="http://schemas.openxmlformats.org/drawingml/2006/main">
+            <a:r>
+              <a:rPr b="1" dirty="0"/>
+              <a:t>image</a:t>
+            </a:r>
+            <a:endParaRPr dirty="0"/>
+          </a:p>
+          <a:p xmlns:a="http://schemas.openxmlformats.org/drawingml/2006/main">
+            <a:r>
+              <a:rPr b="0" dirty="0"/>
+              <a:t>No alt text provided</a:t>
+            </a:r>
+            <a:endParaRPr dirty="0"/>
+          </a:p>
+          <a:p xmlns:a="http://schemas.openxmlformats.org/drawingml/2006/main">
+            <a:r>
+              <a:rPr b="0" dirty="0"/>
+              <a:t/>
+            </a:r>
+            <a:endParaRPr dirty="0"/>
+          </a:p>
+          <a:p xmlns:a="http://schemas.openxmlformats.org/drawingml/2006/main">
+            <a:r>
+              <a:rPr b="1" dirty="0"/>
+              <a:t>shape</a:t>
+            </a:r>
+            <a:endParaRPr dirty="0"/>
+          </a:p>
+          <a:p xmlns:a="http://schemas.openxmlformats.org/drawingml/2006/main">
+            <a:r>
+              <a:rPr b="0" dirty="0"/>
+              <a:t>No alt text provided</a:t>
+            </a:r>
+            <a:endParaRPr dirty="0"/>
+          </a:p>
+          <a:p xmlns:a="http://schemas.openxmlformats.org/drawingml/2006/main">
+            <a:r>
+              <a:rPr b="0" dirty="0"/>
+              <a:t/>
+            </a:r>
+            <a:endParaRPr dirty="0"/>
+          </a:p>
+          <a:p xmlns:a="http://schemas.openxmlformats.org/drawingml/2006/main">
+            <a:r>
+              <a:rPr b="1" dirty="0"/>
+              <a:t>% Envolvimento Atual</a:t>
+            </a:r>
+            <a:endParaRPr dirty="0"/>
+          </a:p>
+          <a:p xmlns:a="http://schemas.openxmlformats.org/drawingml/2006/main">
+            <a:r>
+              <a:rPr b="0" dirty="0"/>
+              <a:t>No alt text provided</a:t>
+            </a:r>
+            <a:endParaRPr dirty="0"/>
+          </a:p>
+          <a:p xmlns:a="http://schemas.openxmlformats.org/drawingml/2006/main">
+            <a:r>
+              <a:rPr b="0" dirty="0"/>
+              <a:t/>
+            </a:r>
+            <a:endParaRPr dirty="0"/>
+          </a:p>
+          <a:p xmlns:a="http://schemas.openxmlformats.org/drawingml/2006/main">
+            <a:r>
+              <a:rPr b="1" dirty="0"/>
+              <a:t>actionButton</a:t>
+            </a:r>
+            <a:endParaRPr dirty="0"/>
+          </a:p>
+          <a:p xmlns:a="http://schemas.openxmlformats.org/drawingml/2006/main">
+            <a:r>
+              <a:rPr b="0" dirty="0"/>
+              <a:t>No alt text provided</a:t>
+            </a:r>
+            <a:endParaRPr dirty="0"/>
+          </a:p>
+          <a:p xmlns:a="http://schemas.openxmlformats.org/drawingml/2006/main">
+            <a:r>
+              <a:rPr b="0" dirty="0"/>
+              <a:t/>
+            </a:r>
+            <a:endParaRPr dirty="0"/>
+          </a:p>
+          <a:p xmlns:a="http://schemas.openxmlformats.org/drawingml/2006/main">
+            <a:r>
+              <a:rPr b="1" dirty="0"/>
+              <a:t>slicer</a:t>
+            </a:r>
+            <a:endParaRPr dirty="0"/>
+          </a:p>
+          <a:p xmlns:a="http://schemas.openxmlformats.org/drawingml/2006/main">
+            <a:r>
+              <a:rPr b="0" dirty="0"/>
+              <a:t>No alt text provided</a:t>
+            </a:r>
+            <a:endParaRPr dirty="0"/>
+          </a:p>
+          <a:p xmlns:a="http://schemas.openxmlformats.org/drawingml/2006/main">
+            <a:r>
+              <a:rPr b="0" dirty="0"/>
+              <a:t/>
+            </a:r>
+            <a:endParaRPr dirty="0"/>
+          </a:p>
+          <a:p xmlns:a="http://schemas.openxmlformats.org/drawingml/2006/main">
+            <a:r>
+              <a:rPr b="1" dirty="0"/>
+              <a:t>actionButton</a:t>
+            </a:r>
+            <a:endParaRPr dirty="0"/>
+          </a:p>
+          <a:p xmlns:a="http://schemas.openxmlformats.org/drawingml/2006/main">
+            <a:r>
+              <a:rPr b="0" dirty="0"/>
+              <a:t>No alt text provided</a:t>
+            </a:r>
+            <a:endParaRPr dirty="0"/>
+          </a:p>
+          <a:p xmlns:a="http://schemas.openxmlformats.org/drawingml/2006/main">
+            <a:r>
+              <a:rPr b="0" dirty="0"/>
+              <a:t/>
+            </a:r>
+            <a:endParaRPr dirty="0"/>
+          </a:p>
+          <a:p xmlns:a="http://schemas.openxmlformats.org/drawingml/2006/main">
+            <a:r>
+              <a:rPr b="1" dirty="0"/>
+              <a:t>% Equil. V/T Crítico Atual</a:t>
+            </a:r>
+            <a:endParaRPr dirty="0"/>
+          </a:p>
+          <a:p xmlns:a="http://schemas.openxmlformats.org/drawingml/2006/main">
+            <a:r>
+              <a:rPr b="0" dirty="0"/>
+              <a:t>No alt text provided</a:t>
+            </a:r>
+            <a:endParaRPr dirty="0"/>
+          </a:p>
+          <a:p xmlns:a="http://schemas.openxmlformats.org/drawingml/2006/main">
+            <a:r>
+              <a:rPr b="0" dirty="0"/>
+              <a:t/>
+            </a:r>
+            <a:endParaRPr dirty="0"/>
+          </a:p>
+          <a:p xmlns:a="http://schemas.openxmlformats.org/drawingml/2006/main">
+            <a:r>
+              <a:rPr b="1" dirty="0"/>
+              <a:t>Dimensões de Satisfação- Survey Atual</a:t>
+            </a:r>
+            <a:endParaRPr dirty="0"/>
+          </a:p>
+          <a:p xmlns:a="http://schemas.openxmlformats.org/drawingml/2006/main">
+            <a:r>
+              <a:rPr b="0" dirty="0"/>
+              <a:t>No alt text provided</a:t>
+            </a:r>
+            <a:endParaRPr dirty="0"/>
+          </a:p>
+          <a:p xmlns:a="http://schemas.openxmlformats.org/drawingml/2006/main">
+            <a:r>
+              <a:rPr b="0" dirty="0"/>
+              <a:t/>
+            </a:r>
+            <a:endParaRPr dirty="0"/>
+          </a:p>
+          <a:p xmlns:a="http://schemas.openxmlformats.org/drawingml/2006/main">
+            <a:r>
+              <a:rPr b="1" dirty="0"/>
+              <a:t>shape</a:t>
+            </a:r>
+            <a:endParaRPr dirty="0"/>
+          </a:p>
+          <a:p xmlns:a="http://schemas.openxmlformats.org/drawingml/2006/main">
+            <a:r>
+              <a:rPr b="0" dirty="0"/>
+              <a:t>No alt text provided</a:t>
+            </a:r>
+            <a:endParaRPr dirty="0"/>
+          </a:p>
+          <a:p xmlns:a="http://schemas.openxmlformats.org/drawingml/2006/main">
+            <a:r>
+              <a:rPr b="0" dirty="0"/>
+              <a:t/>
+            </a:r>
+            <a:endParaRPr dirty="0"/>
+          </a:p>
+          <a:p xmlns:a="http://schemas.openxmlformats.org/drawingml/2006/main">
+            <a:r>
+              <a:rPr b="1" dirty="0"/>
+              <a:t>actionButton</a:t>
+            </a:r>
+            <a:endParaRPr dirty="0"/>
+          </a:p>
+          <a:p xmlns:a="http://schemas.openxmlformats.org/drawingml/2006/main">
+            <a:r>
+              <a:rPr b="0" dirty="0"/>
+              <a:t>No alt text provided</a:t>
+            </a:r>
+            <a:endParaRPr dirty="0"/>
+          </a:p>
+          <a:p xmlns:a="http://schemas.openxmlformats.org/drawingml/2006/main">
+            <a:r>
+              <a:rPr b="0" dirty="0"/>
+              <a:t/>
+            </a:r>
+            <a:endParaRPr dirty="0"/>
+          </a:p>
+          <a:p xmlns:a="http://schemas.openxmlformats.org/drawingml/2006/main">
+            <a:r>
+              <a:rPr b="1" dirty="0"/>
+              <a:t>Matriz Atual de Satisfação</a:t>
+            </a:r>
+            <a:endParaRPr dirty="0"/>
+          </a:p>
+          <a:p xmlns:a="http://schemas.openxmlformats.org/drawingml/2006/main">
+            <a:r>
+              <a:rPr b="0" dirty="0"/>
+              <a:t>No alt text provided</a:t>
+            </a:r>
+            <a:endParaRPr dirty="0"/>
+          </a:p>
+          <a:p xmlns:a="http://schemas.openxmlformats.org/drawingml/2006/main">
+            <a:r>
+              <a:rPr b="0" dirty="0"/>
+              <a:t/>
+            </a:r>
+            <a:endParaRPr dirty="0"/>
+          </a:p>
+          <a:p xmlns:a="http://schemas.openxmlformats.org/drawingml/2006/main">
+            <a:r>
+              <a:rPr b="1" dirty="0"/>
+              <a:t>Distribuição Equilíbrio Vida/Trabalho - Survey Atual</a:t>
+            </a:r>
+            <a:endParaRPr dirty="0"/>
+          </a:p>
+          <a:p xmlns:a="http://schemas.openxmlformats.org/drawingml/2006/main">
+            <a:r>
+              <a:rPr b="0" dirty="0"/>
+              <a:t>No alt text provided</a:t>
+            </a:r>
+            <a:endParaRPr dirty="0"/>
+          </a:p>
+          <a:p xmlns:a="http://schemas.openxmlformats.org/drawingml/2006/main">
+            <a:r>
+              <a:rPr b="0" dirty="0"/>
+              <a:t/>
+            </a:r>
+            <a:endParaRPr dirty="0"/>
+          </a:p>
+          <a:p xmlns:a="http://schemas.openxmlformats.org/drawingml/2006/main">
+            <a:r>
+              <a:rPr b="1" dirty="0"/>
+              <a:t>Equilíbrio V/T Atual por Departamento</a:t>
+            </a:r>
+            <a:endParaRPr dirty="0"/>
+          </a:p>
+          <a:p xmlns:a="http://schemas.openxmlformats.org/drawingml/2006/main">
+            <a:r>
+              <a:rPr b="0" dirty="0"/>
+              <a:t>No alt text provided</a:t>
+            </a:r>
+            <a:endParaRPr dirty="0"/>
+          </a:p>
+          <a:p xmlns:a="http://schemas.openxmlformats.org/drawingml/2006/main">
+            <a:r>
+              <a:rPr b="0" dirty="0"/>
+              <a:t/>
+            </a:r>
+            <a:endParaRPr dirty="0"/>
+          </a:p>
+          <a:p xmlns:a="http://schemas.openxmlformats.org/drawingml/2006/main">
+            <a:r>
+              <a:rPr b="1" dirty="0"/>
+              <a:t>Felicidade Atual por Departamento</a:t>
+            </a:r>
+            <a:endParaRPr dirty="0"/>
+          </a:p>
+          <a:p xmlns:a="http://schemas.openxmlformats.org/drawingml/2006/main">
+            <a:r>
+              <a:rPr b="0" dirty="0"/>
+              <a:t>No alt text provided</a:t>
+            </a:r>
+            <a:endParaRPr dirty="0"/>
+          </a:p>
+          <a:p xmlns:a="http://schemas.openxmlformats.org/drawingml/2006/main">
+            <a:r>
+              <a:rPr b="0" dirty="0"/>
+              <a:t/>
+            </a:r>
+            <a:endParaRPr dirty="0"/>
+          </a:p>
+          <a:p xmlns:a="http://schemas.openxmlformats.org/drawingml/2006/main">
+            <a:r>
+              <a:rPr b="1" dirty="0"/>
+              <a:t>% Equilíbrio V/T Atual</a:t>
+            </a:r>
+            <a:endParaRPr dirty="0"/>
+          </a:p>
+          <a:p xmlns:a="http://schemas.openxmlformats.org/drawingml/2006/main">
+            <a:r>
+              <a:rPr b="0" dirty="0"/>
+              <a:t>No alt text provided</a:t>
+            </a:r>
+            <a:endParaRPr dirty="0"/>
+          </a:p>
+          <a:p xmlns:a="http://schemas.openxmlformats.org/drawingml/2006/main">
+            <a:r>
+              <a:rPr b="0" dirty="0"/>
+              <a:t/>
+            </a:r>
+            <a:endParaRPr dirty="0"/>
+          </a:p>
+          <a:p xmlns:a="http://schemas.openxmlformats.org/drawingml/2006/main">
+            <a:r>
+              <a:rPr b="1" dirty="0"/>
+              <a:t>Colaboradores Atuais</a:t>
+            </a:r>
+            <a:endParaRPr dirty="0"/>
+          </a:p>
+          <a:p xmlns:a="http://schemas.openxmlformats.org/drawingml/2006/main">
+            <a:r>
+              <a:rPr b="0" dirty="0"/>
+              <a:t>No alt text provided</a:t>
+            </a:r>
+            <a:endParaRPr dirty="0"/>
+          </a:p>
+          <a:p xmlns:a="http://schemas.openxmlformats.org/drawingml/2006/main">
+            <a:r>
+              <a:rPr b="0" dirty="0"/>
+              <a:t/>
+            </a:r>
+            <a:endParaRPr dirty="0"/>
+          </a:p>
+          <a:p xmlns:a="http://schemas.openxmlformats.org/drawingml/2006/main">
+            <a:r>
+              <a:rPr b="1" dirty="0"/>
+              <a:t>textbox</a:t>
+            </a:r>
+            <a:endParaRPr dirty="0"/>
+          </a:p>
+          <a:p xmlns:a="http://schemas.openxmlformats.org/drawingml/2006/main">
+            <a:r>
+              <a:rPr b="0" dirty="0"/>
+              <a:t>No alt text provided</a:t>
+            </a:r>
+            <a:endParaRPr dirty="0"/>
+          </a:p>
+          <a:p xmlns:a="http://schemas.openxmlformats.org/drawingml/2006/main">
+            <a:r>
+              <a:rPr b="0" dirty="0"/>
+              <a:t/>
+            </a:r>
+            <a:endParaRPr dirty="0"/>
+          </a:p>
+          <a:p xmlns:a="http://schemas.openxmlformats.org/drawingml/2006/main">
+            <a:r>
+              <a:rPr b="1" dirty="0"/>
+              <a:t>actionButton</a:t>
+            </a:r>
+            <a:endParaRPr dirty="0"/>
+          </a:p>
+          <a:p xmlns:a="http://schemas.openxmlformats.org/drawingml/2006/main">
+            <a:r>
+              <a:rPr b="0" dirty="0"/>
+              <a:t>No alt text provided</a:t>
+            </a:r>
+            <a:endParaRPr dirty="0"/>
+          </a:p>
+          <a:p xmlns:a="http://schemas.openxmlformats.org/drawingml/2006/main">
+            <a:r>
+              <a:rPr b="0" dirty="0"/>
+              <a:t/>
+            </a:r>
+            <a:endParaRPr dirty="0"/>
+          </a:p>
+          <a:p xmlns:a="http://schemas.openxmlformats.org/drawingml/2006/main">
+            <a:r>
+              <a:rPr b="1" dirty="0"/>
+              <a:t>% Felicidade Atual</a:t>
+            </a:r>
+            <a:endParaRPr dirty="0"/>
+          </a:p>
+          <a:p xmlns:a="http://schemas.openxmlformats.org/drawingml/2006/main">
+            <a:r>
+              <a:rPr b="0" dirty="0"/>
+              <a:t>No alt text provided</a:t>
+            </a:r>
+            <a:endParaRPr dirty="0"/>
+          </a:p>
+          <a:p xmlns:a="http://schemas.openxmlformats.org/drawingml/2006/main">
+            <a:r>
+              <a:rPr b="0" dirty="0"/>
+              <a:t/>
+            </a:r>
+            <a:endParaRPr dirty="0"/>
+          </a:p>
+          <a:p xmlns:a="http://schemas.openxmlformats.org/drawingml/2006/main">
+            <a:r>
+              <a:rPr b="1" dirty="0"/>
+              <a:t>shape</a:t>
+            </a:r>
+            <a:endParaRPr dirty="0"/>
+          </a:p>
+          <a:p xmlns:a="http://schemas.openxmlformats.org/drawingml/2006/main">
+            <a:r>
+              <a:rPr b="0" dirty="0"/>
+              <a:t>No alt text provided</a:t>
+            </a:r>
+            <a:endParaRPr dirty="0"/>
+          </a:p>
+          <a:p xmlns:a="http://schemas.openxmlformats.org/drawingml/2006/main">
+            <a:r>
+              <a:rPr b="0" dirty="0"/>
+              <a:t/>
+            </a:r>
+            <a:endParaRPr dirty="0"/>
+          </a:p>
+          <a:p xmlns:a="http://schemas.openxmlformats.org/drawingml/2006/main">
+            <a:r>
+              <a:rPr b="1" dirty="0"/>
+              <a:t>slicer</a:t>
+            </a:r>
+            <a:endParaRPr dirty="0"/>
+          </a:p>
+          <a:p xmlns:a="http://schemas.openxmlformats.org/drawingml/2006/main">
+            <a:r>
+              <a:rPr b="0" dirty="0"/>
+              <a:t>No alt text provided</a:t>
+            </a:r>
+            <a:endParaRPr dirty="0"/>
+          </a:p>
+          <a:p xmlns:a="http://schemas.openxmlformats.org/drawingml/2006/main">
+            <a:r>
+              <a:rPr b="0" dirty="0"/>
+              <a:t/>
+            </a:r>
+            <a:endParaRPr dirty="0"/>
+          </a:p>
+          <a:p xmlns:a="http://schemas.openxmlformats.org/drawingml/2006/main">
+            <a:r>
+              <a:rPr b="1" dirty="0"/>
+              <a:t>actionButton</a:t>
+            </a:r>
+            <a:endParaRPr dirty="0"/>
+          </a:p>
+          <a:p xmlns:a="http://schemas.openxmlformats.org/drawingml/2006/main">
+            <a:r>
+              <a:rPr b="0" dirty="0"/>
+              <a:t>No alt text provided</a:t>
+            </a:r>
+            <a:endParaRPr dirty="0"/>
+          </a:p>
+          <a:p xmlns:a="http://schemas.openxmlformats.org/drawingml/2006/main">
+            <a:r>
+              <a:rPr b="0" dirty="0"/>
+              <a:t/>
+            </a:r>
+            <a:endParaRPr dirty="0"/>
+          </a:p>
+          <a:p xmlns:a="http://schemas.openxmlformats.org/drawingml/2006/main">
+            <a:r>
+              <a:rPr b="1" dirty="0"/>
+              <a:t>slicer</a:t>
+            </a:r>
+            <a:endParaRPr dirty="0"/>
+          </a:p>
+          <a:p xmlns:a="http://schemas.openxmlformats.org/drawingml/2006/main">
+            <a:r>
+              <a:rPr b="0" dirty="0"/>
+              <a:t>No alt text provided</a:t>
+            </a:r>
+            <a:endParaRPr dirty="0"/>
+          </a:p>
+          <a:p xmlns:a="http://schemas.openxmlformats.org/drawingml/2006/main">
+            <a:r>
+              <a:rPr b="0" dirty="0"/>
+              <a:t/>
+            </a:r>
+            <a:endParaRPr dirty="0"/>
+          </a:p>
+          <a:p xmlns:a="http://schemas.openxmlformats.org/drawingml/2006/main">
+            <a:r>
+              <a:rPr b="1" dirty="0"/>
+              <a:t>actionButton</a:t>
+            </a:r>
+            <a:endParaRPr dirty="0"/>
+          </a:p>
+          <a:p xmlns:a="http://schemas.openxmlformats.org/drawingml/2006/main">
+            <a:r>
+              <a:rPr b="0" dirty="0"/>
+              <a:t>No alt text provided</a:t>
+            </a:r>
+            <a:endParaRPr dirty="0"/>
+          </a:p>
+          <a:p xmlns:a="http://schemas.openxmlformats.org/drawingml/2006/main">
+            <a:r>
+              <a:rPr b="0" dirty="0"/>
+              <a:t/>
+            </a:r>
+            <a:endParaRPr dirty="0"/>
+          </a:p>
+        </p:txBody>
+      </p:sp>
+    </p:spTree>
+    <p:clrMapOvr>
+      <a:masterClrMapping xmlns:a="http://schemas.openxmlformats.org/drawingml/2006/main"/>
+    </p:clrMapOvr>
+  </p:cSld>
+</p:notes>
+</file>
+
+<file path=ppt/notesSlides/notesSlide6.xml><?xml version="1.0" encoding="utf-8"?>
+<p:notes xmlns:p="http://schemas.openxmlformats.org/presentationml/2006/main">
+  <p:cSld>
+    <p:spTree>
+      <p:nvGrpSpPr>
+        <p:cNvPr id="1" name=""/>
+        <p:cNvGrpSpPr/>
+        <p:nvPr/>
+      </p:nvGrpSpPr>
+      <p:grpSpPr/>
+      <p:sp>
+        <p:nvSpPr>
+          <p:cNvPr id="2" name="Slide Text"/>
+          <p:cNvSpPr>
+            <a:spLocks xmlns:a="http://schemas.openxmlformats.org/drawingml/2006/main" noGrp="1"/>
+          </p:cNvSpPr>
+          <p:nvPr>
+            <p:ph type="body" idx="1"/>
+          </p:nvPr>
+        </p:nvSpPr>
+        <p:spPr/>
+        <p:txBody>
+          <a:bodyPr xmlns:a="http://schemas.openxmlformats.org/drawingml/2006/main"/>
+          <a:lstStyle xmlns:a="http://schemas.openxmlformats.org/drawingml/2006/main"/>
+          <a:p xmlns:a="http://schemas.openxmlformats.org/drawingml/2006/main">
+            <a:r>
+              <a:rPr b="1" dirty="0"/>
+              <a:t>Variação da Felicidade por Departamento</a:t>
+            </a:r>
+            <a:endParaRPr dirty="0"/>
+          </a:p>
+          <a:p xmlns:a="http://schemas.openxmlformats.org/drawingml/2006/main">
+            <a:r>
+              <a:rPr b="0" dirty="0"/>
+              <a:t>No alt text provided</a:t>
+            </a:r>
+            <a:endParaRPr dirty="0"/>
+          </a:p>
+          <a:p xmlns:a="http://schemas.openxmlformats.org/drawingml/2006/main">
+            <a:r>
+              <a:rPr b="0" dirty="0"/>
+              <a:t/>
+            </a:r>
+            <a:endParaRPr dirty="0"/>
+          </a:p>
+          <a:p xmlns:a="http://schemas.openxmlformats.org/drawingml/2006/main">
+            <a:r>
+              <a:rPr b="1" dirty="0"/>
+              <a:t>% Felicid. Comum Atual</a:t>
+            </a:r>
+            <a:endParaRPr dirty="0"/>
+          </a:p>
+          <a:p xmlns:a="http://schemas.openxmlformats.org/drawingml/2006/main">
+            <a:r>
+              <a:rPr b="0" dirty="0"/>
+              <a:t>No alt text provided</a:t>
+            </a:r>
+            <a:endParaRPr dirty="0"/>
+          </a:p>
+          <a:p xmlns:a="http://schemas.openxmlformats.org/drawingml/2006/main">
+            <a:r>
+              <a:rPr b="0" dirty="0"/>
+              <a:t/>
+            </a:r>
+            <a:endParaRPr dirty="0"/>
+          </a:p>
+          <a:p xmlns:a="http://schemas.openxmlformats.org/drawingml/2006/main">
+            <a:r>
+              <a:rPr b="1" dirty="0"/>
+              <a:t>Matriz Comparativa por Departamento</a:t>
+            </a:r>
+            <a:endParaRPr dirty="0"/>
+          </a:p>
+          <a:p xmlns:a="http://schemas.openxmlformats.org/drawingml/2006/main">
+            <a:r>
+              <a:rPr b="0" dirty="0"/>
+              <a:t>No alt text provided</a:t>
+            </a:r>
+            <a:endParaRPr dirty="0"/>
+          </a:p>
+          <a:p xmlns:a="http://schemas.openxmlformats.org/drawingml/2006/main">
+            <a:r>
+              <a:rPr b="0" dirty="0"/>
+              <a:t/>
+            </a:r>
+            <a:endParaRPr dirty="0"/>
+          </a:p>
+          <a:p xmlns:a="http://schemas.openxmlformats.org/drawingml/2006/main">
+            <a:r>
+              <a:rPr b="1" dirty="0"/>
+              <a:t>actionButton</a:t>
+            </a:r>
+            <a:endParaRPr dirty="0"/>
+          </a:p>
+          <a:p xmlns:a="http://schemas.openxmlformats.org/drawingml/2006/main">
+            <a:r>
+              <a:rPr b="0" dirty="0"/>
+              <a:t>No alt text provided</a:t>
+            </a:r>
+            <a:endParaRPr dirty="0"/>
+          </a:p>
+          <a:p xmlns:a="http://schemas.openxmlformats.org/drawingml/2006/main">
+            <a:r>
+              <a:rPr b="0" dirty="0"/>
+              <a:t/>
+            </a:r>
+            <a:endParaRPr dirty="0"/>
+          </a:p>
+          <a:p xmlns:a="http://schemas.openxmlformats.org/drawingml/2006/main">
+            <a:r>
+              <a:rPr b="1" dirty="0"/>
+              <a:t>Saídas</a:t>
+            </a:r>
+            <a:endParaRPr dirty="0"/>
+          </a:p>
+          <a:p xmlns:a="http://schemas.openxmlformats.org/drawingml/2006/main">
+            <a:r>
+              <a:rPr b="0" dirty="0"/>
+              <a:t>No alt text provided</a:t>
+            </a:r>
+            <a:endParaRPr dirty="0"/>
+          </a:p>
+          <a:p xmlns:a="http://schemas.openxmlformats.org/drawingml/2006/main">
+            <a:r>
+              <a:rPr b="0" dirty="0"/>
+              <a:t/>
+            </a:r>
+            <a:endParaRPr dirty="0"/>
+          </a:p>
+          <a:p xmlns:a="http://schemas.openxmlformats.org/drawingml/2006/main">
+            <a:r>
+              <a:rPr b="1" dirty="0"/>
+              <a:t>slicer</a:t>
+            </a:r>
+            <a:endParaRPr dirty="0"/>
+          </a:p>
+          <a:p xmlns:a="http://schemas.openxmlformats.org/drawingml/2006/main">
+            <a:r>
+              <a:rPr b="0" dirty="0"/>
+              <a:t>No alt text provided</a:t>
+            </a:r>
+            <a:endParaRPr dirty="0"/>
+          </a:p>
+          <a:p xmlns:a="http://schemas.openxmlformats.org/drawingml/2006/main">
+            <a:r>
+              <a:rPr b="0" dirty="0"/>
+              <a:t/>
+            </a:r>
+            <a:endParaRPr dirty="0"/>
+          </a:p>
+          <a:p xmlns:a="http://schemas.openxmlformats.org/drawingml/2006/main">
+            <a:r>
+              <a:rPr b="1" dirty="0"/>
+              <a:t>Evolução Individual da Felicidade</a:t>
+            </a:r>
+            <a:endParaRPr dirty="0"/>
+          </a:p>
+          <a:p xmlns:a="http://schemas.openxmlformats.org/drawingml/2006/main">
+            <a:r>
+              <a:rPr b="0" dirty="0"/>
+              <a:t>No alt text provided</a:t>
+            </a:r>
+            <a:endParaRPr dirty="0"/>
+          </a:p>
+          <a:p xmlns:a="http://schemas.openxmlformats.org/drawingml/2006/main">
+            <a:r>
+              <a:rPr b="0" dirty="0"/>
+              <a:t/>
+            </a:r>
+            <a:endParaRPr dirty="0"/>
+          </a:p>
+          <a:p xmlns:a="http://schemas.openxmlformats.org/drawingml/2006/main">
+            <a:r>
+              <a:rPr b="1" dirty="0"/>
+              <a:t>actionButton</a:t>
+            </a:r>
+            <a:endParaRPr dirty="0"/>
+          </a:p>
+          <a:p xmlns:a="http://schemas.openxmlformats.org/drawingml/2006/main">
+            <a:r>
+              <a:rPr b="0" dirty="0"/>
+              <a:t>No alt text provided</a:t>
+            </a:r>
+            <a:endParaRPr dirty="0"/>
+          </a:p>
+          <a:p xmlns:a="http://schemas.openxmlformats.org/drawingml/2006/main">
+            <a:r>
+              <a:rPr b="0" dirty="0"/>
+              <a:t/>
+            </a:r>
+            <a:endParaRPr dirty="0"/>
+          </a:p>
+          <a:p xmlns:a="http://schemas.openxmlformats.org/drawingml/2006/main">
+            <a:r>
+              <a:rPr b="1" dirty="0"/>
+              <a:t>textbox</a:t>
+            </a:r>
+            <a:endParaRPr dirty="0"/>
+          </a:p>
+          <a:p xmlns:a="http://schemas.openxmlformats.org/drawingml/2006/main">
+            <a:r>
+              <a:rPr b="0" dirty="0"/>
+              <a:t>No alt text provided</a:t>
+            </a:r>
+            <a:endParaRPr dirty="0"/>
+          </a:p>
+          <a:p xmlns:a="http://schemas.openxmlformats.org/drawingml/2006/main">
+            <a:r>
+              <a:rPr b="0" dirty="0"/>
+              <a:t/>
+            </a:r>
+            <a:endParaRPr dirty="0"/>
+          </a:p>
+          <a:p xmlns:a="http://schemas.openxmlformats.org/drawingml/2006/main">
+            <a:r>
+              <a:rPr b="1" dirty="0"/>
+              <a:t>% Variação do Equil. V/T</a:t>
+            </a:r>
+            <a:endParaRPr dirty="0"/>
+          </a:p>
+          <a:p xmlns:a="http://schemas.openxmlformats.org/drawingml/2006/main">
+            <a:r>
+              <a:rPr b="0" dirty="0"/>
+              <a:t>No alt text provided</a:t>
+            </a:r>
+            <a:endParaRPr dirty="0"/>
+          </a:p>
+          <a:p xmlns:a="http://schemas.openxmlformats.org/drawingml/2006/main">
+            <a:r>
+              <a:rPr b="0" dirty="0"/>
+              <a:t/>
+            </a:r>
+            <a:endParaRPr dirty="0"/>
+          </a:p>
+          <a:p xmlns:a="http://schemas.openxmlformats.org/drawingml/2006/main">
+            <a:r>
+              <a:rPr b="1" dirty="0"/>
+              <a:t>% Variação da Felicidade</a:t>
+            </a:r>
+            <a:endParaRPr dirty="0"/>
+          </a:p>
+          <a:p xmlns:a="http://schemas.openxmlformats.org/drawingml/2006/main">
+            <a:r>
+              <a:rPr b="0" dirty="0"/>
+              <a:t>No alt text provided</a:t>
+            </a:r>
+            <a:endParaRPr dirty="0"/>
+          </a:p>
+          <a:p xmlns:a="http://schemas.openxmlformats.org/drawingml/2006/main">
+            <a:r>
+              <a:rPr b="0" dirty="0"/>
+              <a:t/>
+            </a:r>
+            <a:endParaRPr dirty="0"/>
+          </a:p>
+          <a:p xmlns:a="http://schemas.openxmlformats.org/drawingml/2006/main">
+            <a:r>
+              <a:rPr b="1" dirty="0"/>
+              <a:t>actionButton</a:t>
+            </a:r>
+            <a:endParaRPr dirty="0"/>
+          </a:p>
+          <a:p xmlns:a="http://schemas.openxmlformats.org/drawingml/2006/main">
+            <a:r>
+              <a:rPr b="0" dirty="0"/>
+              <a:t>No alt text provided</a:t>
+            </a:r>
+            <a:endParaRPr dirty="0"/>
+          </a:p>
+          <a:p xmlns:a="http://schemas.openxmlformats.org/drawingml/2006/main">
+            <a:r>
+              <a:rPr b="0" dirty="0"/>
+              <a:t/>
+            </a:r>
+            <a:endParaRPr dirty="0"/>
+          </a:p>
+          <a:p xmlns:a="http://schemas.openxmlformats.org/drawingml/2006/main">
+            <a:r>
+              <a:rPr b="1" dirty="0"/>
+              <a:t>slicer</a:t>
+            </a:r>
+            <a:endParaRPr dirty="0"/>
+          </a:p>
+          <a:p xmlns:a="http://schemas.openxmlformats.org/drawingml/2006/main">
+            <a:r>
+              <a:rPr b="0" dirty="0"/>
+              <a:t>No alt text provided</a:t>
+            </a:r>
+            <a:endParaRPr dirty="0"/>
+          </a:p>
+          <a:p xmlns:a="http://schemas.openxmlformats.org/drawingml/2006/main">
+            <a:r>
+              <a:rPr b="0" dirty="0"/>
+              <a:t/>
+            </a:r>
+            <a:endParaRPr dirty="0"/>
+          </a:p>
+          <a:p xmlns:a="http://schemas.openxmlformats.org/drawingml/2006/main">
+            <a:r>
+              <a:rPr b="1" dirty="0"/>
+              <a:t>actionButton</a:t>
+            </a:r>
+            <a:endParaRPr dirty="0"/>
+          </a:p>
+          <a:p xmlns:a="http://schemas.openxmlformats.org/drawingml/2006/main">
+            <a:r>
+              <a:rPr b="0" dirty="0"/>
+              <a:t>No alt text provided</a:t>
+            </a:r>
+            <a:endParaRPr dirty="0"/>
+          </a:p>
+          <a:p xmlns:a="http://schemas.openxmlformats.org/drawingml/2006/main">
+            <a:r>
+              <a:rPr b="0" dirty="0"/>
+              <a:t/>
+            </a:r>
+            <a:endParaRPr dirty="0"/>
+          </a:p>
+          <a:p xmlns:a="http://schemas.openxmlformats.org/drawingml/2006/main">
+            <a:r>
+              <a:rPr b="1" dirty="0"/>
+              <a:t>actionButton</a:t>
+            </a:r>
+            <a:endParaRPr dirty="0"/>
+          </a:p>
+          <a:p xmlns:a="http://schemas.openxmlformats.org/drawingml/2006/main">
+            <a:r>
+              <a:rPr b="0" dirty="0"/>
+              <a:t>No alt text provided</a:t>
+            </a:r>
+            <a:endParaRPr dirty="0"/>
+          </a:p>
+          <a:p xmlns:a="http://schemas.openxmlformats.org/drawingml/2006/main">
+            <a:r>
+              <a:rPr b="0" dirty="0"/>
+              <a:t/>
+            </a:r>
+            <a:endParaRPr dirty="0"/>
+          </a:p>
+          <a:p xmlns:a="http://schemas.openxmlformats.org/drawingml/2006/main">
+            <a:r>
+              <a:rPr b="1" dirty="0"/>
+              <a:t>shape</a:t>
+            </a:r>
+            <a:endParaRPr dirty="0"/>
+          </a:p>
+          <a:p xmlns:a="http://schemas.openxmlformats.org/drawingml/2006/main">
+            <a:r>
+              <a:rPr b="0" dirty="0"/>
+              <a:t>No alt text provided</a:t>
+            </a:r>
+            <a:endParaRPr dirty="0"/>
+          </a:p>
+          <a:p xmlns:a="http://schemas.openxmlformats.org/drawingml/2006/main">
+            <a:r>
+              <a:rPr b="0" dirty="0"/>
+              <a:t/>
+            </a:r>
+            <a:endParaRPr dirty="0"/>
+          </a:p>
+          <a:p xmlns:a="http://schemas.openxmlformats.org/drawingml/2006/main">
+            <a:r>
+              <a:rPr b="1" dirty="0"/>
+              <a:t>% Mudança para pior</a:t>
+            </a:r>
+            <a:endParaRPr dirty="0"/>
+          </a:p>
+          <a:p xmlns:a="http://schemas.openxmlformats.org/drawingml/2006/main">
+            <a:r>
+              <a:rPr b="0" dirty="0"/>
+              <a:t>No alt text provided</a:t>
+            </a:r>
+            <a:endParaRPr dirty="0"/>
+          </a:p>
+          <a:p xmlns:a="http://schemas.openxmlformats.org/drawingml/2006/main">
+            <a:r>
+              <a:rPr b="0" dirty="0"/>
+              <a:t/>
+            </a:r>
+            <a:endParaRPr dirty="0"/>
+          </a:p>
+          <a:p xmlns:a="http://schemas.openxmlformats.org/drawingml/2006/main">
+            <a:r>
+              <a:rPr b="1" dirty="0"/>
+              <a:t>textbox</a:t>
+            </a:r>
+            <a:endParaRPr dirty="0"/>
+          </a:p>
+          <a:p xmlns:a="http://schemas.openxmlformats.org/drawingml/2006/main">
+            <a:r>
+              <a:rPr b="0" dirty="0"/>
+              <a:t>No alt text provided</a:t>
+            </a:r>
+            <a:endParaRPr dirty="0"/>
+          </a:p>
+          <a:p xmlns:a="http://schemas.openxmlformats.org/drawingml/2006/main">
+            <a:r>
+              <a:rPr b="0" dirty="0"/>
+              <a:t/>
+            </a:r>
+            <a:endParaRPr dirty="0"/>
+          </a:p>
+          <a:p xmlns:a="http://schemas.openxmlformats.org/drawingml/2006/main">
+            <a:r>
+              <a:rPr b="1" dirty="0"/>
+              <a:t>% Felicid. Comum Inicial</a:t>
+            </a:r>
+            <a:endParaRPr dirty="0"/>
+          </a:p>
+          <a:p xmlns:a="http://schemas.openxmlformats.org/drawingml/2006/main">
+            <a:r>
+              <a:rPr b="0" dirty="0"/>
+              <a:t>No alt text provided</a:t>
+            </a:r>
+            <a:endParaRPr dirty="0"/>
+          </a:p>
+          <a:p xmlns:a="http://schemas.openxmlformats.org/drawingml/2006/main">
+            <a:r>
+              <a:rPr b="0" dirty="0"/>
+              <a:t/>
+            </a:r>
+            <a:endParaRPr dirty="0"/>
+          </a:p>
+          <a:p xmlns:a="http://schemas.openxmlformats.org/drawingml/2006/main">
+            <a:r>
+              <a:rPr b="1" dirty="0"/>
+              <a:t>actionButton</a:t>
+            </a:r>
+            <a:endParaRPr dirty="0"/>
+          </a:p>
+          <a:p xmlns:a="http://schemas.openxmlformats.org/drawingml/2006/main">
+            <a:r>
+              <a:rPr b="0" dirty="0"/>
+              <a:t>No alt text provided</a:t>
+            </a:r>
+            <a:endParaRPr dirty="0"/>
+          </a:p>
+          <a:p xmlns:a="http://schemas.openxmlformats.org/drawingml/2006/main">
+            <a:r>
+              <a:rPr b="0" dirty="0"/>
+              <a:t/>
+            </a:r>
+            <a:endParaRPr dirty="0"/>
+          </a:p>
+          <a:p xmlns:a="http://schemas.openxmlformats.org/drawingml/2006/main">
+            <a:r>
+              <a:rPr b="1" dirty="0"/>
+              <a:t>shape</a:t>
+            </a:r>
+            <a:endParaRPr dirty="0"/>
+          </a:p>
+          <a:p xmlns:a="http://schemas.openxmlformats.org/drawingml/2006/main">
+            <a:r>
+              <a:rPr b="0" dirty="0"/>
+              <a:t>No alt text provided</a:t>
+            </a:r>
+            <a:endParaRPr dirty="0"/>
+          </a:p>
+          <a:p xmlns:a="http://schemas.openxmlformats.org/drawingml/2006/main">
+            <a:r>
+              <a:rPr b="0" dirty="0"/>
+              <a:t/>
+            </a:r>
+            <a:endParaRPr dirty="0"/>
+          </a:p>
+          <a:p xmlns:a="http://schemas.openxmlformats.org/drawingml/2006/main">
+            <a:r>
+              <a:rPr b="1" dirty="0"/>
+              <a:t>Felicidade Inicial vs. Atual por Departamento</a:t>
+            </a:r>
+            <a:endParaRPr dirty="0"/>
+          </a:p>
+          <a:p xmlns:a="http://schemas.openxmlformats.org/drawingml/2006/main">
+            <a:r>
+              <a:rPr b="0" dirty="0"/>
+              <a:t>No alt text provided</a:t>
+            </a:r>
+            <a:endParaRPr dirty="0"/>
+          </a:p>
+          <a:p xmlns:a="http://schemas.openxmlformats.org/drawingml/2006/main">
+            <a:r>
+              <a:rPr b="0" dirty="0"/>
+              <a:t/>
+            </a:r>
+            <a:endParaRPr dirty="0"/>
+          </a:p>
+          <a:p xmlns:a="http://schemas.openxmlformats.org/drawingml/2006/main">
+            <a:r>
+              <a:rPr b="1" dirty="0"/>
+              <a:t>actionButton</a:t>
+            </a:r>
+            <a:endParaRPr dirty="0"/>
+          </a:p>
+          <a:p xmlns:a="http://schemas.openxmlformats.org/drawingml/2006/main">
+            <a:r>
+              <a:rPr b="0" dirty="0"/>
+              <a:t>No alt text provided</a:t>
+            </a:r>
+            <a:endParaRPr dirty="0"/>
+          </a:p>
+          <a:p xmlns:a="http://schemas.openxmlformats.org/drawingml/2006/main">
+            <a:r>
+              <a:rPr b="0" dirty="0"/>
+              <a:t/>
+            </a:r>
+            <a:endParaRPr dirty="0"/>
+          </a:p>
+          <a:p xmlns:a="http://schemas.openxmlformats.org/drawingml/2006/main">
+            <a:r>
+              <a:rPr b="1" dirty="0"/>
+              <a:t>slicer</a:t>
+            </a:r>
+            <a:endParaRPr dirty="0"/>
+          </a:p>
+          <a:p xmlns:a="http://schemas.openxmlformats.org/drawingml/2006/main">
+            <a:r>
+              <a:rPr b="0" dirty="0"/>
+              <a:t>No alt text provided</a:t>
+            </a:r>
+            <a:endParaRPr dirty="0"/>
+          </a:p>
+          <a:p xmlns:a="http://schemas.openxmlformats.org/drawingml/2006/main">
+            <a:r>
+              <a:rPr b="0" dirty="0"/>
+              <a:t/>
+            </a:r>
+            <a:endParaRPr dirty="0"/>
+          </a:p>
+          <a:p xmlns:a="http://schemas.openxmlformats.org/drawingml/2006/main">
+            <a:r>
+              <a:rPr b="1" dirty="0"/>
+              <a:t>shape</a:t>
+            </a:r>
+            <a:endParaRPr dirty="0"/>
+          </a:p>
+          <a:p xmlns:a="http://schemas.openxmlformats.org/drawingml/2006/main">
+            <a:r>
+              <a:rPr b="0" dirty="0"/>
+              <a:t>No alt text provided</a:t>
+            </a:r>
+            <a:endParaRPr dirty="0"/>
+          </a:p>
+          <a:p xmlns:a="http://schemas.openxmlformats.org/drawingml/2006/main">
+            <a:r>
+              <a:rPr b="0" dirty="0"/>
+              <a:t/>
+            </a:r>
+            <a:endParaRPr dirty="0"/>
+          </a:p>
+          <a:p xmlns:a="http://schemas.openxmlformats.org/drawingml/2006/main">
+            <a:r>
+              <a:rPr b="1" dirty="0"/>
+              <a:t>image</a:t>
+            </a:r>
+            <a:endParaRPr dirty="0"/>
+          </a:p>
+          <a:p xmlns:a="http://schemas.openxmlformats.org/drawingml/2006/main">
+            <a:r>
+              <a:rPr b="0" dirty="0"/>
+              <a:t>No alt text provided</a:t>
+            </a:r>
+            <a:endParaRPr dirty="0"/>
+          </a:p>
+          <a:p xmlns:a="http://schemas.openxmlformats.org/drawingml/2006/main">
+            <a:r>
+              <a:rPr b="0" dirty="0"/>
+              <a:t/>
+            </a:r>
+            <a:endParaRPr dirty="0"/>
+          </a:p>
+          <a:p xmlns:a="http://schemas.openxmlformats.org/drawingml/2006/main">
+            <a:r>
+              <a:rPr b="1" dirty="0"/>
+              <a:t>actionButton</a:t>
+            </a:r>
+            <a:endParaRPr dirty="0"/>
+          </a:p>
+          <a:p xmlns:a="http://schemas.openxmlformats.org/drawingml/2006/main">
+            <a:r>
+              <a:rPr b="0" dirty="0"/>
+              <a:t>No alt text provided</a:t>
+            </a:r>
+            <a:endParaRPr dirty="0"/>
+          </a:p>
+          <a:p xmlns:a="http://schemas.openxmlformats.org/drawingml/2006/main">
+            <a:r>
+              <a:rPr b="0" dirty="0"/>
+              <a:t/>
+            </a:r>
+            <a:endParaRPr dirty="0"/>
+          </a:p>
+          <a:p xmlns:a="http://schemas.openxmlformats.org/drawingml/2006/main">
+            <a:r>
+              <a:rPr b="1" dirty="0"/>
+              <a:t>actionButton</a:t>
             </a:r>
             <a:endParaRPr dirty="0"/>
           </a:p>
@@ -5144,7 +7055,7 @@
                 <a:ea typeface="Segoe UI" charset="0"/>
                 <a:cs typeface="Segoe UI" charset="0"/>
               </a:rPr>
-              <a:t>8/2/2026 11:28:05 PM UTC</a:t>
+              <a:t>8/4/2026 9:16:16 PM UTC</a:t>
             </a:r>
           </a:p>
         </p:txBody>
@@ -5201,7 +7112,7 @@
                 <a:ea typeface="Segoe UI" charset="0"/>
                 <a:cs typeface="Segoe UI" charset="0"/>
               </a:rPr>
-              <a:t>8/2/2026 11:18:28 PM UTC</a:t>
+              <a:t>8/4/2026 9:08:06 PM UTC</a:t>
             </a:r>
             <a:endParaRPr lang="en-US" sz="900" b="0" i="0" dirty="0">
               <a:solidFill>
@@ -5305,7 +7216,7 @@
       <p:grpSpPr/>
       <p:pic>
         <p:nvPicPr>
-          <p:cNvPr id="3" name="Picture" title="This slide contains the following visuals: image ,Exposição à reforma por departamento ,actionButton ,slicer ,slicer ,Índice Equilíbrio Trabalho/Vida Atual ,Variação Felicidade ,Índice Felicidade Atual ,actionButton ,Colaboradores Atuais ,textbox ,% Reforma em 5 anos ,Idade Média Atual ,actionButton ,actionButton ,textbox ,textbox ,slicer ,Distribuição etária atual ,Inicial vs. atual por departamento ,actionButton ,shape ,Rácio Feminino ,shape ,actionButton ,actionButton ,shape. Please refer to the notes on this slide for details">
+          <p:cNvPr id="3" name="Picture" title="This slide contains the following visuals: image ,Exposição à reforma por departamento ,actionButton ,slicer ,slicer ,% Equilíbrio Vida/Trabalho Atual ,Variação Felicidade ,% Felicidade Atual ,actionButton ,Colaboradores Atuais ,textbox ,% Reforma em 5 anos ,Idade Média Atual ,actionButton ,actionButton ,textbox ,textbox ,slicer ,Distribuição etária atual ,% Felicidade inicial vs. atual por departamento ,actionButton ,shape ,Rácio Feminino ,shape ,actionButton ,actionButton ,shape. Please refer to the notes on this slide for details">
             <a:hlinkClick xmlns:r="http://schemas.openxmlformats.org/officeDocument/2006/relationships" xmlns:a="http://schemas.openxmlformats.org/drawingml/2006/main" r:id="RelId0"/>
           </p:cNvPr>
           <p:cNvPicPr>
@@ -5314,7 +7225,7 @@
           <p:nvPr/>
         </p:nvPicPr>
         <p:blipFill>
-          <a:blip xmlns:r="http://schemas.openxmlformats.org/officeDocument/2006/relationships" xmlns:a="http://schemas.openxmlformats.org/drawingml/2006/main" r:embed="imgId107607354"/>
+          <a:blip xmlns:r="http://schemas.openxmlformats.org/officeDocument/2006/relationships" xmlns:a="http://schemas.openxmlformats.org/drawingml/2006/main" r:embed="imgId108004603"/>
           <a:stretch xmlns:a="http://schemas.openxmlformats.org/drawingml/2006/main">
             <a:fillRect/>
           </a:stretch>
@@ -5380,7 +7291,7 @@
           <p:nvPr/>
         </p:nvPicPr>
         <p:blipFill>
-          <a:blip xmlns:r="http://schemas.openxmlformats.org/officeDocument/2006/relationships" xmlns:a="http://schemas.openxmlformats.org/drawingml/2006/main" r:embed="imgId107607356"/>
+          <a:blip xmlns:r="http://schemas.openxmlformats.org/officeDocument/2006/relationships" xmlns:a="http://schemas.openxmlformats.org/drawingml/2006/main" r:embed="imgId108004606"/>
           <a:stretch xmlns:a="http://schemas.openxmlformats.org/drawingml/2006/main">
             <a:fillRect/>
           </a:stretch>
@@ -5446,7 +7357,7 @@
           <p:nvPr/>
         </p:nvPicPr>
         <p:blipFill>
-          <a:blip xmlns:r="http://schemas.openxmlformats.org/officeDocument/2006/relationships" xmlns:a="http://schemas.openxmlformats.org/drawingml/2006/main" r:embed="imgId107607358"/>
+          <a:blip xmlns:r="http://schemas.openxmlformats.org/officeDocument/2006/relationships" xmlns:a="http://schemas.openxmlformats.org/drawingml/2006/main" r:embed="imgId108004610"/>
           <a:stretch xmlns:a="http://schemas.openxmlformats.org/drawingml/2006/main">
             <a:fillRect/>
           </a:stretch>
@@ -5479,6 +7390,204 @@
           <a:p xmlns:a="http://schemas.openxmlformats.org/drawingml/2006/main">
             <a:r>
               <a:t>Reforma</a:t>
+            </a:r>
+          </a:p>
+        </p:txBody>
+      </p:sp>
+    </p:spTree>
+    <p:clrMapOvr>
+      <a:masterClrMapping xmlns:a="http://schemas.openxmlformats.org/drawingml/2006/main"/>
+    </p:clrMapOvr>
+  </p:cSld>
+</p:sld>
+</file>
+
+<file path=ppt/slides/slide5.xml><?xml version="1.0" encoding="utf-8"?>
+<p:sld xmlns:p="http://schemas.openxmlformats.org/presentationml/2006/main">
+  <p:cSld>
+    <p:spTree>
+      <p:nvGrpSpPr>
+        <p:cNvPr id="1" name=""/>
+        <p:cNvGrpSpPr/>
+        <p:nvPr/>
+      </p:nvGrpSpPr>
+      <p:grpSpPr/>
+      <p:pic>
+        <p:nvPicPr>
+          <p:cNvPr id="3" name="Picture" title="This slide contains the following visuals: % Envolvimento Inicial ,N.º Felicidade boa ou + ,Distribuição Equilíbrio Vida/Trabalho - Survey Inicial ,actionButton ,textbox ,slicer ,shape ,slicer ,Dimensões de Satisfação - Survey Inicial ,Colaboradores Iniciais ,% Felicidade Inicial ,actionButton ,% Equil. V/T Crítico Inicial ,textbox ,slicer ,Felicidade Inicial por Departamento ,actionButton ,actionButton ,image ,actionButton ,actionButton ,actionButton ,actionButton ,shape ,shape ,actionButton ,% Equilíbrio V/T Inicial ,Matriz Inicial de Satisfação ,Equilíbrio V/T Inicial por Departamento. Please refer to the notes on this slide for details">
+            <a:hlinkClick xmlns:r="http://schemas.openxmlformats.org/officeDocument/2006/relationships" xmlns:a="http://schemas.openxmlformats.org/drawingml/2006/main" r:id="RelId3"/>
+          </p:cNvPr>
+          <p:cNvPicPr>
+            <a:picLocks xmlns:a="http://schemas.openxmlformats.org/drawingml/2006/main" noChangeAspect="1"/>
+          </p:cNvPicPr>
+          <p:nvPr/>
+        </p:nvPicPr>
+        <p:blipFill>
+          <a:blip xmlns:r="http://schemas.openxmlformats.org/officeDocument/2006/relationships" xmlns:a="http://schemas.openxmlformats.org/drawingml/2006/main" r:embed="imgId108004608"/>
+          <a:stretch xmlns:a="http://schemas.openxmlformats.org/drawingml/2006/main">
+            <a:fillRect/>
+          </a:stretch>
+        </p:blipFill>
+        <p:spPr>
+          <a:xfrm xmlns:a="http://schemas.openxmlformats.org/drawingml/2006/main">
+            <a:off x="76200" y="0"/>
+            <a:ext cx="12020550" cy="6858000"/>
+          </a:xfrm>
+          <a:prstGeom xmlns:a="http://schemas.openxmlformats.org/drawingml/2006/main" prst="rect">
+            <a:avLst/>
+          </a:prstGeom>
+          <a:noFill xmlns:a="http://schemas.openxmlformats.org/drawingml/2006/main"/>
+        </p:spPr>
+      </p:pic>
+      <p:sp>
+        <p:nvSpPr>
+          <p:cNvPr id="4" name="Title" hidden="1"/>
+          <p:cNvSpPr>
+            <a:spLocks xmlns:a="http://schemas.openxmlformats.org/drawingml/2006/main" noGrp="1"/>
+          </p:cNvSpPr>
+          <p:nvPr>
+            <p:ph type="title"/>
+          </p:nvPr>
+        </p:nvSpPr>
+        <p:spPr/>
+        <p:txBody>
+          <a:bodyPr xmlns:a="http://schemas.openxmlformats.org/drawingml/2006/main"/>
+          <a:lstStyle xmlns:a="http://schemas.openxmlformats.org/drawingml/2006/main"/>
+          <a:p xmlns:a="http://schemas.openxmlformats.org/drawingml/2006/main">
+            <a:r>
+              <a:t>Survey Inicial</a:t>
+            </a:r>
+          </a:p>
+        </p:txBody>
+      </p:sp>
+    </p:spTree>
+    <p:clrMapOvr>
+      <a:masterClrMapping xmlns:a="http://schemas.openxmlformats.org/drawingml/2006/main"/>
+    </p:clrMapOvr>
+  </p:cSld>
+</p:sld>
+</file>
+
+<file path=ppt/slides/slide6.xml><?xml version="1.0" encoding="utf-8"?>
+<p:sld xmlns:p="http://schemas.openxmlformats.org/presentationml/2006/main">
+  <p:cSld>
+    <p:spTree>
+      <p:nvGrpSpPr>
+        <p:cNvPr id="1" name=""/>
+        <p:cNvGrpSpPr/>
+        <p:nvPr/>
+      </p:nvGrpSpPr>
+      <p:grpSpPr/>
+      <p:pic>
+        <p:nvPicPr>
+          <p:cNvPr id="3" name="Picture" title="This slide contains the following visuals: actionButton ,N.º Felicidade boa ou + ,actionButton ,textbox ,actionButton ,image ,shape ,% Envolvimento Atual ,actionButton ,slicer ,actionButton ,% Equil. V/T Crítico Atual ,Dimensões de Satisfação- Survey Atual ,shape ,actionButton ,Matriz Atual de Satisfação ,Distribuição Equilíbrio Vida/Trabalho - Survey Atual ,Equilíbrio V/T Atual por Departamento ,Felicidade Atual por Departamento ,% Equilíbrio V/T Atual ,Colaboradores Atuais ,textbox ,actionButton ,% Felicidade Atual ,shape ,slicer ,actionButton ,slicer ,actionButton. Please refer to the notes on this slide for details">
+            <a:hlinkClick xmlns:r="http://schemas.openxmlformats.org/officeDocument/2006/relationships" xmlns:a="http://schemas.openxmlformats.org/drawingml/2006/main" r:id="RelId4"/>
+          </p:cNvPr>
+          <p:cNvPicPr>
+            <a:picLocks xmlns:a="http://schemas.openxmlformats.org/drawingml/2006/main" noChangeAspect="1"/>
+          </p:cNvPicPr>
+          <p:nvPr/>
+        </p:nvPicPr>
+        <p:blipFill>
+          <a:blip xmlns:r="http://schemas.openxmlformats.org/officeDocument/2006/relationships" xmlns:a="http://schemas.openxmlformats.org/drawingml/2006/main" r:embed="imgId108004599"/>
+          <a:stretch xmlns:a="http://schemas.openxmlformats.org/drawingml/2006/main">
+            <a:fillRect/>
+          </a:stretch>
+        </p:blipFill>
+        <p:spPr>
+          <a:xfrm xmlns:a="http://schemas.openxmlformats.org/drawingml/2006/main">
+            <a:off x="76200" y="0"/>
+            <a:ext cx="12020550" cy="6858000"/>
+          </a:xfrm>
+          <a:prstGeom xmlns:a="http://schemas.openxmlformats.org/drawingml/2006/main" prst="rect">
+            <a:avLst/>
+          </a:prstGeom>
+          <a:noFill xmlns:a="http://schemas.openxmlformats.org/drawingml/2006/main"/>
+        </p:spPr>
+      </p:pic>
+      <p:sp>
+        <p:nvSpPr>
+          <p:cNvPr id="4" name="Title" hidden="1"/>
+          <p:cNvSpPr>
+            <a:spLocks xmlns:a="http://schemas.openxmlformats.org/drawingml/2006/main" noGrp="1"/>
+          </p:cNvSpPr>
+          <p:nvPr>
+            <p:ph type="title"/>
+          </p:nvPr>
+        </p:nvSpPr>
+        <p:spPr/>
+        <p:txBody>
+          <a:bodyPr xmlns:a="http://schemas.openxmlformats.org/drawingml/2006/main"/>
+          <a:lstStyle xmlns:a="http://schemas.openxmlformats.org/drawingml/2006/main"/>
+          <a:p xmlns:a="http://schemas.openxmlformats.org/drawingml/2006/main">
+            <a:r>
+              <a:t>Survey Atual</a:t>
+            </a:r>
+          </a:p>
+        </p:txBody>
+      </p:sp>
+    </p:spTree>
+    <p:clrMapOvr>
+      <a:masterClrMapping xmlns:a="http://schemas.openxmlformats.org/drawingml/2006/main"/>
+    </p:clrMapOvr>
+  </p:cSld>
+</p:sld>
+</file>
+
+<file path=ppt/slides/slide7.xml><?xml version="1.0" encoding="utf-8"?>
+<p:sld xmlns:p="http://schemas.openxmlformats.org/presentationml/2006/main">
+  <p:cSld>
+    <p:spTree>
+      <p:nvGrpSpPr>
+        <p:cNvPr id="1" name=""/>
+        <p:cNvGrpSpPr/>
+        <p:nvPr/>
+      </p:nvGrpSpPr>
+      <p:grpSpPr/>
+      <p:pic>
+        <p:nvPicPr>
+          <p:cNvPr id="3" name="Picture" title="This slide contains the following visuals: Variação da Felicidade por Departamento ,% Felicid. Comum Atual ,Matriz Comparativa por Departamento ,actionButton ,Saídas ,slicer ,Evolução Individual da Felicidade ,actionButton ,textbox ,% Variação do Equil. V/T ,% Variação da Felicidade ,actionButton ,slicer ,actionButton ,actionButton ,shape ,% Mudança para pior ,textbox ,% Felicid. Comum Inicial ,actionButton ,shape ,Felicidade Inicial vs. Atual por Departamento ,actionButton ,slicer ,shape ,image ,actionButton ,actionButton. Please refer to the notes on this slide for details">
+            <a:hlinkClick xmlns:r="http://schemas.openxmlformats.org/officeDocument/2006/relationships" xmlns:a="http://schemas.openxmlformats.org/drawingml/2006/main" r:id="RelId5"/>
+          </p:cNvPr>
+          <p:cNvPicPr>
+            <a:picLocks xmlns:a="http://schemas.openxmlformats.org/drawingml/2006/main" noChangeAspect="1"/>
+          </p:cNvPicPr>
+          <p:nvPr/>
+        </p:nvPicPr>
+        <p:blipFill>
+          <a:blip xmlns:r="http://schemas.openxmlformats.org/officeDocument/2006/relationships" xmlns:a="http://schemas.openxmlformats.org/drawingml/2006/main" r:embed="imgId108004609"/>
+          <a:stretch xmlns:a="http://schemas.openxmlformats.org/drawingml/2006/main">
+            <a:fillRect/>
+          </a:stretch>
+        </p:blipFill>
+        <p:spPr>
+          <a:xfrm xmlns:a="http://schemas.openxmlformats.org/drawingml/2006/main">
+            <a:off x="76200" y="0"/>
+            <a:ext cx="12020550" cy="6858000"/>
+          </a:xfrm>
+          <a:prstGeom xmlns:a="http://schemas.openxmlformats.org/drawingml/2006/main" prst="rect">
+            <a:avLst/>
+          </a:prstGeom>
+          <a:noFill xmlns:a="http://schemas.openxmlformats.org/drawingml/2006/main"/>
+        </p:spPr>
+      </p:pic>
+      <p:sp>
+        <p:nvSpPr>
+          <p:cNvPr id="4" name="Title" hidden="1"/>
+          <p:cNvSpPr>
+            <a:spLocks xmlns:a="http://schemas.openxmlformats.org/drawingml/2006/main" noGrp="1"/>
+          </p:cNvSpPr>
+          <p:nvPr>
+            <p:ph type="title"/>
+          </p:nvPr>
+        </p:nvSpPr>
+        <p:spPr/>
+        <p:txBody>
+          <a:bodyPr xmlns:a="http://schemas.openxmlformats.org/drawingml/2006/main"/>
+          <a:lstStyle xmlns:a="http://schemas.openxmlformats.org/drawingml/2006/main"/>
+          <a:p xmlns:a="http://schemas.openxmlformats.org/drawingml/2006/main">
+            <a:r>
+              <a:t>Comparativo</a:t>
             </a:r>
           </a:p>
         </p:txBody>
